--- a/classes/parte-12-osint-e-ingenieria-social/251-osint-de-empresas-y-dominios/clase-251-presentacion.pptx
+++ b/classes/parte-12-osint-e-ingenieria-social/251-osint-de-empresas-y-dominios/clase-251-presentacion.pptx
@@ -18,6 +18,10 @@
     <p:sldId id="266" r:id="rId17"/>
     <p:sldId id="267" r:id="rId18"/>
     <p:sldId id="268" r:id="rId19"/>
+    <p:sldId id="269" r:id="rId20"/>
+    <p:sldId id="270" r:id="rId21"/>
+    <p:sldId id="271" r:id="rId22"/>
+    <p:sldId id="272" r:id="rId23"/>
   </p:sldIdLst>
   <p:sldSz cx="9144000" cy="6858000" type="screen4x3"/>
   <p:notesSz cx="6858000" cy="9144000"/>
@@ -3199,7 +3203,7 @@
                   <a:srgbClr val="0B3D2E"/>
                 </a:solidFill>
               </a:rPr>
-              <a:t>📝 Reto verificable</a:t>
+              <a:t>🧰 Herramientas y preparación</a:t>
             </a:r>
           </a:p>
         </p:txBody>
@@ -3237,52 +3241,67 @@
                   <a:srgbClr val="22282E"/>
                 </a:solidFill>
               </a:rPr>
-              <a:t>•  Produce un inventario de exposición de un dominio autorizado con: subdominios vivos, tecnologías,</a:t>
-            </a:r>
-          </a:p>
-          <a:p>
-            <a:pPr>
-              <a:spcAft>
-                <a:spcPts val="600"/>
-              </a:spcAft>
-            </a:pPr>
-            <a:r>
-              <a:rPr sz="1500">
-                <a:solidFill>
-                  <a:srgbClr val="22282E"/>
-                </a:solidFill>
-              </a:rPr>
-              <a:t>•  política de correo (SPF/DMARC) y al menos 3 recomendaciones priorizadas.</a:t>
-            </a:r>
-          </a:p>
-          <a:p>
-            <a:pPr>
-              <a:spcAft>
-                <a:spcPts val="600"/>
-              </a:spcAft>
-            </a:pPr>
-            <a:r>
-              <a:rPr sz="1500">
-                <a:solidFill>
-                  <a:srgbClr val="22282E"/>
-                </a:solidFill>
-              </a:rPr>
-              <a:t>•  Criterio de aceptación: todos los subdominios se obtuvieron con métodos pasivos reproducibles y</a:t>
-            </a:r>
-          </a:p>
-          <a:p>
-            <a:pPr>
-              <a:spcAft>
-                <a:spcPts val="600"/>
-              </a:spcAft>
-            </a:pPr>
-            <a:r>
-              <a:rPr sz="1500">
-                <a:solidFill>
-                  <a:srgbClr val="22282E"/>
-                </a:solidFill>
-              </a:rPr>
-              <a:t>•  el inventario indica, por cada ítem, la fuente y la acción de remediación sugerida.</a:t>
+              <a:t>•  DNS/WHOIS: whois, dig, host, dnsrecon.</a:t>
+            </a:r>
+          </a:p>
+          <a:p>
+            <a:pPr>
+              <a:spcAft>
+                <a:spcPts val="600"/>
+              </a:spcAft>
+            </a:pPr>
+            <a:r>
+              <a:rPr sz="1500">
+                <a:solidFill>
+                  <a:srgbClr val="22282E"/>
+                </a:solidFill>
+              </a:rPr>
+              <a:t>•  Subdominios pasivos: subfinder, amass enum -passive, crt.sh (https://crt.sh/?q=%25.example.com).</a:t>
+            </a:r>
+          </a:p>
+          <a:p>
+            <a:pPr>
+              <a:spcAft>
+                <a:spcPts val="600"/>
+              </a:spcAft>
+            </a:pPr>
+            <a:r>
+              <a:rPr sz="1500">
+                <a:solidFill>
+                  <a:srgbClr val="22282E"/>
+                </a:solidFill>
+              </a:rPr>
+              <a:t>•  Correos y tecnologías: theHarvester, Wappalyzer, httpx, BuiltWith.</a:t>
+            </a:r>
+          </a:p>
+          <a:p>
+            <a:pPr>
+              <a:spcAft>
+                <a:spcPts val="600"/>
+              </a:spcAft>
+            </a:pPr>
+            <a:r>
+              <a:rPr sz="1500">
+                <a:solidFill>
+                  <a:srgbClr val="22282E"/>
+                </a:solidFill>
+              </a:rPr>
+              <a:t>•  Filtraciones: GitHub dorks, trufflehog, gitleaks, buscadores de buckets S3.</a:t>
+            </a:r>
+          </a:p>
+          <a:p>
+            <a:pPr>
+              <a:spcAft>
+                <a:spcPts val="600"/>
+              </a:spcAft>
+            </a:pPr>
+            <a:r>
+              <a:rPr sz="1500">
+                <a:solidFill>
+                  <a:srgbClr val="22282E"/>
+                </a:solidFill>
+              </a:rPr>
+              <a:t>•  Recordatorio: favorece fuentes pasivas; el escaneo activo solo con autorización del alcance.</a:t>
             </a:r>
           </a:p>
         </p:txBody>
@@ -3333,7 +3352,7 @@
                   <a:srgbClr val="0B3D2E"/>
                 </a:solidFill>
               </a:rPr>
-              <a:t>⚠️ Errores comunes</a:t>
+              <a:t>🧪 Laboratorio guiado</a:t>
             </a:r>
           </a:p>
         </p:txBody>
@@ -3371,67 +3390,97 @@
                   <a:srgbClr val="22282E"/>
                 </a:solidFill>
               </a:rPr>
-              <a:t>•  WHOIS "redacted for privacy" — Ofuscación WHOIS. Pivota vía CT, DNS histórico y NS.</a:t>
-            </a:r>
-          </a:p>
-          <a:p>
-            <a:pPr>
-              <a:spcAft>
-                <a:spcPts val="600"/>
-              </a:spcAft>
-            </a:pPr>
-            <a:r>
-              <a:rPr sz="1500">
-                <a:solidFill>
-                  <a:srgbClr val="22282E"/>
-                </a:solidFill>
-              </a:rPr>
-              <a:t>•  Pocos subdominios encontrados — Solo se usó una fuente. Combina crt.sh + subfinder + amass.</a:t>
-            </a:r>
-          </a:p>
-          <a:p>
-            <a:pPr>
-              <a:spcAft>
-                <a:spcPts val="600"/>
-              </a:spcAft>
-            </a:pPr>
-            <a:r>
-              <a:rPr sz="1500">
-                <a:solidFill>
-                  <a:srgbClr val="22282E"/>
-                </a:solidFill>
-              </a:rPr>
-              <a:t>•  httpx marca todo como vivo — Comodines DNS. Filtra por código/título y valida manualmente.</a:t>
-            </a:r>
-          </a:p>
-          <a:p>
-            <a:pPr>
-              <a:spcAft>
-                <a:spcPts val="600"/>
-              </a:spcAft>
-            </a:pPr>
-            <a:r>
-              <a:rPr sz="1500">
-                <a:solidFill>
-                  <a:srgbClr val="22282E"/>
-                </a:solidFill>
-              </a:rPr>
-              <a:t>•  Falsos secretos en trufflehog — Entropía alta pero no es clave. Verifica el contexto antes de reportar.</a:t>
-            </a:r>
-          </a:p>
-          <a:p>
-            <a:pPr>
-              <a:spcAft>
-                <a:spcPts val="600"/>
-              </a:spcAft>
-            </a:pPr>
-            <a:r>
-              <a:rPr sz="1500">
-                <a:solidFill>
-                  <a:srgbClr val="22282E"/>
-                </a:solidFill>
-              </a:rPr>
-              <a:t>•  Escaneo bloqueado — Se hizo activo sin permiso o el WAF bloqueó. Mantente en pasivo salvo autorización.</a:t>
+              <a:t>•  Objetivo autorizado: usa example.com y un dominio propio.</a:t>
+            </a:r>
+          </a:p>
+          <a:p>
+            <a:pPr>
+              <a:spcAft>
+                <a:spcPts val="600"/>
+              </a:spcAft>
+            </a:pPr>
+            <a:r>
+              <a:rPr sz="1500">
+                <a:solidFill>
+                  <a:srgbClr val="22282E"/>
+                </a:solidFill>
+              </a:rPr>
+              <a:t>•  WHOIS y fechas: whois example.com — anota registrador, fechas y NS.</a:t>
+            </a:r>
+          </a:p>
+          <a:p>
+            <a:pPr>
+              <a:spcAft>
+                <a:spcPts val="600"/>
+              </a:spcAft>
+            </a:pPr>
+            <a:r>
+              <a:rPr sz="1500">
+                <a:solidFill>
+                  <a:srgbClr val="22282E"/>
+                </a:solidFill>
+              </a:rPr>
+              <a:t>•  Registros DNS: dig example.com ANY +noall +answer y dig MX example.com.</a:t>
+            </a:r>
+          </a:p>
+          <a:p>
+            <a:pPr>
+              <a:spcAft>
+                <a:spcPts val="600"/>
+              </a:spcAft>
+            </a:pPr>
+            <a:r>
+              <a:rPr sz="1500">
+                <a:solidFill>
+                  <a:srgbClr val="22282E"/>
+                </a:solidFill>
+              </a:rPr>
+              <a:t>•  Política de correo: dig TXT example.com — busca SPF y dig TXT dmarc.example.com para DMARC.</a:t>
+            </a:r>
+          </a:p>
+          <a:p>
+            <a:pPr>
+              <a:spcAft>
+                <a:spcPts val="600"/>
+              </a:spcAft>
+            </a:pPr>
+            <a:r>
+              <a:rPr sz="1500">
+                <a:solidFill>
+                  <a:srgbClr val="22282E"/>
+                </a:solidFill>
+              </a:rPr>
+              <a:t>•  Subdominios por CT: abre https://crt.sh/?q=%25.tudominio.com y exporta la lista.</a:t>
+            </a:r>
+          </a:p>
+          <a:p>
+            <a:pPr>
+              <a:spcAft>
+                <a:spcPts val="600"/>
+              </a:spcAft>
+            </a:pPr>
+            <a:r>
+              <a:rPr sz="1500">
+                <a:solidFill>
+                  <a:srgbClr val="22282E"/>
+                </a:solidFill>
+              </a:rPr>
+              <a:t>•  Enumeración pasiva: subfinder -d tudominio.com -silent y amass enum -passive -d tudominio.com.</a:t>
+            </a:r>
+          </a:p>
+          <a:p>
+            <a:pPr>
+              <a:spcAft>
+                <a:spcPts val="600"/>
+              </a:spcAft>
+            </a:pPr>
+            <a:r>
+              <a:rPr sz="1500">
+                <a:solidFill>
+                  <a:srgbClr val="22282E"/>
+                </a:solidFill>
+              </a:rPr>
+              <a:t>•  Hosts vivos: subfinder -d tudominio.com -silent | httpx -title -tech-detect.</a:t>
             </a:r>
           </a:p>
         </p:txBody>
@@ -3482,7 +3531,7 @@
                   <a:srgbClr val="0B3D2E"/>
                 </a:solidFill>
               </a:rPr>
-              <a:t>❓ Preguntas frecuentes</a:t>
+              <a:t>✍️ Ejercicios</a:t>
             </a:r>
           </a:p>
         </p:txBody>
@@ -3520,97 +3569,82 @@
                   <a:srgbClr val="22282E"/>
                 </a:solidFill>
               </a:rPr>
-              <a:t>•  ❓ ¿crt.sh es OSINT pasivo?</a:t>
-            </a:r>
-          </a:p>
-          <a:p>
-            <a:pPr>
-              <a:spcAft>
-                <a:spcPts val="600"/>
-              </a:spcAft>
-            </a:pPr>
-            <a:r>
-              <a:rPr sz="1500">
-                <a:solidFill>
-                  <a:srgbClr val="22282E"/>
-                </a:solidFill>
-              </a:rPr>
-              <a:t>•  Sí: consulta logs públicos de certificados, no toca la infraestructura del objetivo, por lo que no</a:t>
-            </a:r>
-          </a:p>
-          <a:p>
-            <a:pPr>
-              <a:spcAft>
-                <a:spcPts val="600"/>
-              </a:spcAft>
-            </a:pPr>
-            <a:r>
-              <a:rPr sz="1500">
-                <a:solidFill>
-                  <a:srgbClr val="22282E"/>
-                </a:solidFill>
-              </a:rPr>
-              <a:t>•  genera tráfico hacia él.</a:t>
-            </a:r>
-          </a:p>
-          <a:p>
-            <a:pPr>
-              <a:spcAft>
-                <a:spcPts val="600"/>
-              </a:spcAft>
-            </a:pPr>
-            <a:r>
-              <a:rPr sz="1500">
-                <a:solidFill>
-                  <a:srgbClr val="22282E"/>
-                </a:solidFill>
-              </a:rPr>
-              <a:t>•  ❓ ¿Encontré una clave en GitHub, qué hago?</a:t>
-            </a:r>
-          </a:p>
-          <a:p>
-            <a:pPr>
-              <a:spcAft>
-                <a:spcPts val="600"/>
-              </a:spcAft>
-            </a:pPr>
-            <a:r>
-              <a:rPr sz="1500">
-                <a:solidFill>
-                  <a:srgbClr val="22282E"/>
-                </a:solidFill>
-              </a:rPr>
-              <a:t>•  Repórtalo por canal responsable al dueño, no la uses. En un engagement, documéntalo como hallazgo</a:t>
-            </a:r>
-          </a:p>
-          <a:p>
-            <a:pPr>
-              <a:spcAft>
-                <a:spcPts val="600"/>
-              </a:spcAft>
-            </a:pPr>
-            <a:r>
-              <a:rPr sz="1500">
-                <a:solidFill>
-                  <a:srgbClr val="22282E"/>
-                </a:solidFill>
-              </a:rPr>
-              <a:t>•  crítico dentro del alcance acordado.</a:t>
-            </a:r>
-          </a:p>
-          <a:p>
-            <a:pPr>
-              <a:spcAft>
-                <a:spcPts val="600"/>
-              </a:spcAft>
-            </a:pPr>
-            <a:r>
-              <a:rPr sz="1500">
-                <a:solidFill>
-                  <a:srgbClr val="22282E"/>
-                </a:solidFill>
-              </a:rPr>
-              <a:t>•  ❓ ¿SPF/DMARC importan para OSINT?</a:t>
+              <a:t>•  Compara los subdominios que devuelven crt.sh, subfinder y amass; explica las diferencias.</a:t>
+            </a:r>
+          </a:p>
+          <a:p>
+            <a:pPr>
+              <a:spcAft>
+                <a:spcPts val="600"/>
+              </a:spcAft>
+            </a:pPr>
+            <a:r>
+              <a:rPr sz="1500">
+                <a:solidFill>
+                  <a:srgbClr val="22282E"/>
+                </a:solidFill>
+              </a:rPr>
+              <a:t>•  Evalúa el SPF/DMARC de un dominio y decide si es suplantable.</a:t>
+            </a:r>
+          </a:p>
+          <a:p>
+            <a:pPr>
+              <a:spcAft>
+                <a:spcPts val="600"/>
+              </a:spcAft>
+            </a:pPr>
+            <a:r>
+              <a:rPr sz="1500">
+                <a:solidFill>
+                  <a:srgbClr val="22282E"/>
+                </a:solidFill>
+              </a:rPr>
+              <a:t>•  Clasifica 5 subdominios por riesgo (panel de login, dev, staging, etc.).</a:t>
+            </a:r>
+          </a:p>
+          <a:p>
+            <a:pPr>
+              <a:spcAft>
+                <a:spcPts val="600"/>
+              </a:spcAft>
+            </a:pPr>
+            <a:r>
+              <a:rPr sz="1500">
+                <a:solidFill>
+                  <a:srgbClr val="22282E"/>
+                </a:solidFill>
+              </a:rPr>
+              <a:t>•  Ejecuta httpx -tech-detect y prioriza 3 tecnologías por CVE conocido.</a:t>
+            </a:r>
+          </a:p>
+          <a:p>
+            <a:pPr>
+              <a:spcAft>
+                <a:spcPts val="600"/>
+              </a:spcAft>
+            </a:pPr>
+            <a:r>
+              <a:rPr sz="1500">
+                <a:solidFill>
+                  <a:srgbClr val="22282E"/>
+                </a:solidFill>
+              </a:rPr>
+              <a:t>•  Deriva el patrón de correo corporativo (nombre.apellido@) a partir de ejemplos públicos.</a:t>
+            </a:r>
+          </a:p>
+          <a:p>
+            <a:pPr>
+              <a:spcAft>
+                <a:spcPts val="600"/>
+              </a:spcAft>
+            </a:pPr>
+            <a:r>
+              <a:rPr sz="1500">
+                <a:solidFill>
+                  <a:srgbClr val="22282E"/>
+                </a:solidFill>
+              </a:rPr>
+              <a:t>•  Documenta un secreto ficticio "encontrado" y redacta la sección de reporte responsable.</a:t>
             </a:r>
           </a:p>
         </p:txBody>
@@ -3661,7 +3695,7 @@
                   <a:srgbClr val="0B3D2E"/>
                 </a:solidFill>
               </a:rPr>
-              <a:t>🔗 Referencias</a:t>
+              <a:t>📝 Reto verificable</a:t>
             </a:r>
           </a:p>
         </p:txBody>
@@ -3699,6 +3733,468 @@
                   <a:srgbClr val="22282E"/>
                 </a:solidFill>
               </a:rPr>
+              <a:t>•  Produce un inventario de exposición de un dominio autorizado con: subdominios vivos, tecnologías,</a:t>
+            </a:r>
+          </a:p>
+          <a:p>
+            <a:pPr>
+              <a:spcAft>
+                <a:spcPts val="600"/>
+              </a:spcAft>
+            </a:pPr>
+            <a:r>
+              <a:rPr sz="1500">
+                <a:solidFill>
+                  <a:srgbClr val="22282E"/>
+                </a:solidFill>
+              </a:rPr>
+              <a:t>•  política de correo (SPF/DMARC) y al menos 3 recomendaciones priorizadas.</a:t>
+            </a:r>
+          </a:p>
+          <a:p>
+            <a:pPr>
+              <a:spcAft>
+                <a:spcPts val="600"/>
+              </a:spcAft>
+            </a:pPr>
+            <a:r>
+              <a:rPr sz="1500">
+                <a:solidFill>
+                  <a:srgbClr val="22282E"/>
+                </a:solidFill>
+              </a:rPr>
+              <a:t>•  Criterio de aceptación: todos los subdominios se obtuvieron con métodos pasivos reproducibles y</a:t>
+            </a:r>
+          </a:p>
+          <a:p>
+            <a:pPr>
+              <a:spcAft>
+                <a:spcPts val="600"/>
+              </a:spcAft>
+            </a:pPr>
+            <a:r>
+              <a:rPr sz="1500">
+                <a:solidFill>
+                  <a:srgbClr val="22282E"/>
+                </a:solidFill>
+              </a:rPr>
+              <a:t>•  el inventario indica, por cada ítem, la fuente y la acción de remediación sugerida.</a:t>
+            </a:r>
+          </a:p>
+        </p:txBody>
+      </p:sp>
+    </p:spTree>
+  </p:cSld>
+  <p:clrMapOvr>
+    <a:masterClrMapping/>
+  </p:clrMapOvr>
+</p:sld>
+</file>
+
+<file path=ppt/slides/slide14.xml><?xml version="1.0" encoding="utf-8"?>
+<p:sld xmlns:a="http://schemas.openxmlformats.org/drawingml/2006/main" xmlns:p="http://schemas.openxmlformats.org/presentationml/2006/main" xmlns:r="http://schemas.openxmlformats.org/officeDocument/2006/relationships">
+  <p:cSld>
+    <p:spTree>
+      <p:nvGrpSpPr>
+        <p:cNvPr id="1" name=""/>
+        <p:cNvGrpSpPr/>
+        <p:nvPr/>
+      </p:nvGrpSpPr>
+      <p:grpSpPr/>
+      <p:sp>
+        <p:nvSpPr>
+          <p:cNvPr id="2" name="TextBox 1"/>
+          <p:cNvSpPr txBox="1"/>
+          <p:nvPr/>
+        </p:nvSpPr>
+        <p:spPr>
+          <a:xfrm>
+            <a:off x="457200" y="320040"/>
+            <a:ext cx="8229600" cy="822960"/>
+          </a:xfrm>
+          <a:prstGeom prst="rect">
+            <a:avLst/>
+          </a:prstGeom>
+          <a:noFill/>
+        </p:spPr>
+        <p:txBody>
+          <a:bodyPr wrap="square">
+            <a:spAutoFit/>
+          </a:bodyPr>
+          <a:lstStyle/>
+          <a:p>
+            <a:r>
+              <a:rPr sz="2600" b="1">
+                <a:solidFill>
+                  <a:srgbClr val="0B3D2E"/>
+                </a:solidFill>
+              </a:rPr>
+              <a:t>⚠️ Errores comunes</a:t>
+            </a:r>
+          </a:p>
+        </p:txBody>
+      </p:sp>
+      <p:sp>
+        <p:nvSpPr>
+          <p:cNvPr id="3" name="TextBox 2"/>
+          <p:cNvSpPr txBox="1"/>
+          <p:nvPr/>
+        </p:nvSpPr>
+        <p:spPr>
+          <a:xfrm>
+            <a:off x="457200" y="1280160"/>
+            <a:ext cx="8229600" cy="4937760"/>
+          </a:xfrm>
+          <a:prstGeom prst="rect">
+            <a:avLst/>
+          </a:prstGeom>
+          <a:noFill/>
+        </p:spPr>
+        <p:txBody>
+          <a:bodyPr wrap="square">
+            <a:spAutoFit/>
+          </a:bodyPr>
+          <a:lstStyle/>
+          <a:p>
+            <a:pPr>
+              <a:spcAft>
+                <a:spcPts val="600"/>
+              </a:spcAft>
+            </a:pPr>
+            <a:r>
+              <a:rPr sz="1500">
+                <a:solidFill>
+                  <a:srgbClr val="22282E"/>
+                </a:solidFill>
+              </a:rPr>
+              <a:t>•  WHOIS "redacted for privacy" — Ofuscación WHOIS. Pivota vía CT, DNS histórico y NS.</a:t>
+            </a:r>
+          </a:p>
+          <a:p>
+            <a:pPr>
+              <a:spcAft>
+                <a:spcPts val="600"/>
+              </a:spcAft>
+            </a:pPr>
+            <a:r>
+              <a:rPr sz="1500">
+                <a:solidFill>
+                  <a:srgbClr val="22282E"/>
+                </a:solidFill>
+              </a:rPr>
+              <a:t>•  Pocos subdominios encontrados — Solo se usó una fuente. Combina crt.sh + subfinder + amass.</a:t>
+            </a:r>
+          </a:p>
+          <a:p>
+            <a:pPr>
+              <a:spcAft>
+                <a:spcPts val="600"/>
+              </a:spcAft>
+            </a:pPr>
+            <a:r>
+              <a:rPr sz="1500">
+                <a:solidFill>
+                  <a:srgbClr val="22282E"/>
+                </a:solidFill>
+              </a:rPr>
+              <a:t>•  httpx marca todo como vivo — Comodines DNS. Filtra por código/título y valida manualmente.</a:t>
+            </a:r>
+          </a:p>
+          <a:p>
+            <a:pPr>
+              <a:spcAft>
+                <a:spcPts val="600"/>
+              </a:spcAft>
+            </a:pPr>
+            <a:r>
+              <a:rPr sz="1500">
+                <a:solidFill>
+                  <a:srgbClr val="22282E"/>
+                </a:solidFill>
+              </a:rPr>
+              <a:t>•  Falsos secretos en trufflehog — Entropía alta pero no es clave. Verifica el contexto antes de reportar.</a:t>
+            </a:r>
+          </a:p>
+          <a:p>
+            <a:pPr>
+              <a:spcAft>
+                <a:spcPts val="600"/>
+              </a:spcAft>
+            </a:pPr>
+            <a:r>
+              <a:rPr sz="1500">
+                <a:solidFill>
+                  <a:srgbClr val="22282E"/>
+                </a:solidFill>
+              </a:rPr>
+              <a:t>•  Escaneo bloqueado — Se hizo activo sin permiso o el WAF bloqueó. Mantente en pasivo salvo autorización.</a:t>
+            </a:r>
+          </a:p>
+        </p:txBody>
+      </p:sp>
+    </p:spTree>
+  </p:cSld>
+  <p:clrMapOvr>
+    <a:masterClrMapping/>
+  </p:clrMapOvr>
+</p:sld>
+</file>
+
+<file path=ppt/slides/slide15.xml><?xml version="1.0" encoding="utf-8"?>
+<p:sld xmlns:a="http://schemas.openxmlformats.org/drawingml/2006/main" xmlns:p="http://schemas.openxmlformats.org/presentationml/2006/main" xmlns:r="http://schemas.openxmlformats.org/officeDocument/2006/relationships">
+  <p:cSld>
+    <p:spTree>
+      <p:nvGrpSpPr>
+        <p:cNvPr id="1" name=""/>
+        <p:cNvGrpSpPr/>
+        <p:nvPr/>
+      </p:nvGrpSpPr>
+      <p:grpSpPr/>
+      <p:sp>
+        <p:nvSpPr>
+          <p:cNvPr id="2" name="TextBox 1"/>
+          <p:cNvSpPr txBox="1"/>
+          <p:nvPr/>
+        </p:nvSpPr>
+        <p:spPr>
+          <a:xfrm>
+            <a:off x="457200" y="320040"/>
+            <a:ext cx="8229600" cy="822960"/>
+          </a:xfrm>
+          <a:prstGeom prst="rect">
+            <a:avLst/>
+          </a:prstGeom>
+          <a:noFill/>
+        </p:spPr>
+        <p:txBody>
+          <a:bodyPr wrap="square">
+            <a:spAutoFit/>
+          </a:bodyPr>
+          <a:lstStyle/>
+          <a:p>
+            <a:r>
+              <a:rPr sz="2600" b="1">
+                <a:solidFill>
+                  <a:srgbClr val="0B3D2E"/>
+                </a:solidFill>
+              </a:rPr>
+              <a:t>❓ Preguntas frecuentes</a:t>
+            </a:r>
+          </a:p>
+        </p:txBody>
+      </p:sp>
+      <p:sp>
+        <p:nvSpPr>
+          <p:cNvPr id="3" name="TextBox 2"/>
+          <p:cNvSpPr txBox="1"/>
+          <p:nvPr/>
+        </p:nvSpPr>
+        <p:spPr>
+          <a:xfrm>
+            <a:off x="457200" y="1280160"/>
+            <a:ext cx="8229600" cy="4937760"/>
+          </a:xfrm>
+          <a:prstGeom prst="rect">
+            <a:avLst/>
+          </a:prstGeom>
+          <a:noFill/>
+        </p:spPr>
+        <p:txBody>
+          <a:bodyPr wrap="square">
+            <a:spAutoFit/>
+          </a:bodyPr>
+          <a:lstStyle/>
+          <a:p>
+            <a:pPr>
+              <a:spcAft>
+                <a:spcPts val="600"/>
+              </a:spcAft>
+            </a:pPr>
+            <a:r>
+              <a:rPr sz="1500">
+                <a:solidFill>
+                  <a:srgbClr val="22282E"/>
+                </a:solidFill>
+              </a:rPr>
+              <a:t>•  ❓ ¿crt.sh es OSINT pasivo?</a:t>
+            </a:r>
+          </a:p>
+          <a:p>
+            <a:pPr>
+              <a:spcAft>
+                <a:spcPts val="600"/>
+              </a:spcAft>
+            </a:pPr>
+            <a:r>
+              <a:rPr sz="1500">
+                <a:solidFill>
+                  <a:srgbClr val="22282E"/>
+                </a:solidFill>
+              </a:rPr>
+              <a:t>•  Sí: consulta logs públicos de certificados, no toca la infraestructura del objetivo, por lo que no</a:t>
+            </a:r>
+          </a:p>
+          <a:p>
+            <a:pPr>
+              <a:spcAft>
+                <a:spcPts val="600"/>
+              </a:spcAft>
+            </a:pPr>
+            <a:r>
+              <a:rPr sz="1500">
+                <a:solidFill>
+                  <a:srgbClr val="22282E"/>
+                </a:solidFill>
+              </a:rPr>
+              <a:t>•  genera tráfico hacia él.</a:t>
+            </a:r>
+          </a:p>
+          <a:p>
+            <a:pPr>
+              <a:spcAft>
+                <a:spcPts val="600"/>
+              </a:spcAft>
+            </a:pPr>
+            <a:r>
+              <a:rPr sz="1500">
+                <a:solidFill>
+                  <a:srgbClr val="22282E"/>
+                </a:solidFill>
+              </a:rPr>
+              <a:t>•  ❓ ¿Encontré una clave en GitHub, qué hago?</a:t>
+            </a:r>
+          </a:p>
+          <a:p>
+            <a:pPr>
+              <a:spcAft>
+                <a:spcPts val="600"/>
+              </a:spcAft>
+            </a:pPr>
+            <a:r>
+              <a:rPr sz="1500">
+                <a:solidFill>
+                  <a:srgbClr val="22282E"/>
+                </a:solidFill>
+              </a:rPr>
+              <a:t>•  Repórtalo por canal responsable al dueño, no la uses. En un engagement, documéntalo como hallazgo</a:t>
+            </a:r>
+          </a:p>
+          <a:p>
+            <a:pPr>
+              <a:spcAft>
+                <a:spcPts val="600"/>
+              </a:spcAft>
+            </a:pPr>
+            <a:r>
+              <a:rPr sz="1500">
+                <a:solidFill>
+                  <a:srgbClr val="22282E"/>
+                </a:solidFill>
+              </a:rPr>
+              <a:t>•  crítico dentro del alcance acordado.</a:t>
+            </a:r>
+          </a:p>
+          <a:p>
+            <a:pPr>
+              <a:spcAft>
+                <a:spcPts val="600"/>
+              </a:spcAft>
+            </a:pPr>
+            <a:r>
+              <a:rPr sz="1500">
+                <a:solidFill>
+                  <a:srgbClr val="22282E"/>
+                </a:solidFill>
+              </a:rPr>
+              <a:t>•  ❓ ¿SPF/DMARC importan para OSINT?</a:t>
+            </a:r>
+          </a:p>
+        </p:txBody>
+      </p:sp>
+    </p:spTree>
+  </p:cSld>
+  <p:clrMapOvr>
+    <a:masterClrMapping/>
+  </p:clrMapOvr>
+</p:sld>
+</file>
+
+<file path=ppt/slides/slide16.xml><?xml version="1.0" encoding="utf-8"?>
+<p:sld xmlns:a="http://schemas.openxmlformats.org/drawingml/2006/main" xmlns:p="http://schemas.openxmlformats.org/presentationml/2006/main" xmlns:r="http://schemas.openxmlformats.org/officeDocument/2006/relationships">
+  <p:cSld>
+    <p:spTree>
+      <p:nvGrpSpPr>
+        <p:cNvPr id="1" name=""/>
+        <p:cNvGrpSpPr/>
+        <p:nvPr/>
+      </p:nvGrpSpPr>
+      <p:grpSpPr/>
+      <p:sp>
+        <p:nvSpPr>
+          <p:cNvPr id="2" name="TextBox 1"/>
+          <p:cNvSpPr txBox="1"/>
+          <p:nvPr/>
+        </p:nvSpPr>
+        <p:spPr>
+          <a:xfrm>
+            <a:off x="457200" y="320040"/>
+            <a:ext cx="8229600" cy="822960"/>
+          </a:xfrm>
+          <a:prstGeom prst="rect">
+            <a:avLst/>
+          </a:prstGeom>
+          <a:noFill/>
+        </p:spPr>
+        <p:txBody>
+          <a:bodyPr wrap="square">
+            <a:spAutoFit/>
+          </a:bodyPr>
+          <a:lstStyle/>
+          <a:p>
+            <a:r>
+              <a:rPr sz="2600" b="1">
+                <a:solidFill>
+                  <a:srgbClr val="0B3D2E"/>
+                </a:solidFill>
+              </a:rPr>
+              <a:t>🔗 Referencias</a:t>
+            </a:r>
+          </a:p>
+        </p:txBody>
+      </p:sp>
+      <p:sp>
+        <p:nvSpPr>
+          <p:cNvPr id="3" name="TextBox 2"/>
+          <p:cNvSpPr txBox="1"/>
+          <p:nvPr/>
+        </p:nvSpPr>
+        <p:spPr>
+          <a:xfrm>
+            <a:off x="457200" y="1280160"/>
+            <a:ext cx="8229600" cy="4937760"/>
+          </a:xfrm>
+          <a:prstGeom prst="rect">
+            <a:avLst/>
+          </a:prstGeom>
+          <a:noFill/>
+        </p:spPr>
+        <p:txBody>
+          <a:bodyPr wrap="square">
+            <a:spAutoFit/>
+          </a:bodyPr>
+          <a:lstStyle/>
+          <a:p>
+            <a:pPr>
+              <a:spcAft>
+                <a:spcPts val="600"/>
+              </a:spcAft>
+            </a:pPr>
+            <a:r>
+              <a:rPr sz="1500">
+                <a:solidFill>
+                  <a:srgbClr val="22282E"/>
+                </a:solidFill>
+              </a:rPr>
               <a:t>•  Bazzell, M. Open Source Intelligence Techniques. &lt;https://inteltechniques.com/book1.html&gt;</a:t>
             </a:r>
           </a:p>
@@ -3764,6 +4260,81 @@
           </a:p>
         </p:txBody>
       </p:sp>
+    </p:spTree>
+  </p:cSld>
+  <p:clrMapOvr>
+    <a:masterClrMapping/>
+  </p:clrMapOvr>
+</p:sld>
+</file>
+
+<file path=ppt/slides/slide17.xml><?xml version="1.0" encoding="utf-8"?>
+<p:sld xmlns:a="http://schemas.openxmlformats.org/drawingml/2006/main" xmlns:p="http://schemas.openxmlformats.org/presentationml/2006/main" xmlns:r="http://schemas.openxmlformats.org/officeDocument/2006/relationships">
+  <p:cSld>
+    <p:spTree>
+      <p:nvGrpSpPr>
+        <p:cNvPr id="1" name=""/>
+        <p:cNvGrpSpPr/>
+        <p:nvPr/>
+      </p:nvGrpSpPr>
+      <p:grpSpPr/>
+      <p:sp>
+        <p:nvSpPr>
+          <p:cNvPr id="2" name="TextBox 1"/>
+          <p:cNvSpPr txBox="1"/>
+          <p:nvPr/>
+        </p:nvSpPr>
+        <p:spPr>
+          <a:xfrm>
+            <a:off x="457200" y="274320"/>
+            <a:ext cx="8229600" cy="640080"/>
+          </a:xfrm>
+          <a:prstGeom prst="rect">
+            <a:avLst/>
+          </a:prstGeom>
+          <a:noFill/>
+        </p:spPr>
+        <p:txBody>
+          <a:bodyPr wrap="square">
+            <a:spAutoFit/>
+          </a:bodyPr>
+          <a:lstStyle/>
+          <a:p>
+            <a:r>
+              <a:rPr sz="2200" b="1">
+                <a:solidFill>
+                  <a:srgbClr val="0B3D2E"/>
+                </a:solidFill>
+              </a:rPr>
+              <a:t>Diagrama de la clase</a:t>
+            </a:r>
+          </a:p>
+        </p:txBody>
+      </p:sp>
+      <p:pic>
+        <p:nvPicPr>
+          <p:cNvPr id="3" name="Picture 2" descr="da9af5e35a2c4d38.png"/>
+          <p:cNvPicPr>
+            <a:picLocks noChangeAspect="1"/>
+          </p:cNvPicPr>
+          <p:nvPr/>
+        </p:nvPicPr>
+        <p:blipFill>
+          <a:blip r:embed="rId2"/>
+          <a:stretch>
+            <a:fillRect/>
+          </a:stretch>
+        </p:blipFill>
+        <p:spPr>
+          <a:xfrm>
+            <a:off x="457200" y="2688336"/>
+            <a:ext cx="8229600" cy="2121408"/>
+          </a:xfrm>
+          <a:prstGeom prst="rect">
+            <a:avLst/>
+          </a:prstGeom>
+        </p:spPr>
+      </p:pic>
     </p:spTree>
   </p:cSld>
   <p:clrMapOvr>
@@ -4406,7 +4977,7 @@
                   <a:srgbClr val="0B3D2E"/>
                 </a:solidFill>
               </a:rPr>
-              <a:t>📖 Definiciones y características</a:t>
+              <a:t>🧠 Explicación en profundidad</a:t>
             </a:r>
           </a:p>
         </p:txBody>
@@ -4444,82 +5015,67 @@
                   <a:srgbClr val="22282E"/>
                 </a:solidFill>
               </a:rPr>
-              <a:t>•  WHOIS: base de datos de registro de dominios/IP. Característica: cada vez más ofuscada por privacidad, pero útil por fechas y NS.</a:t>
-            </a:r>
-          </a:p>
-          <a:p>
-            <a:pPr>
-              <a:spcAft>
-                <a:spcPts val="600"/>
-              </a:spcAft>
-            </a:pPr>
-            <a:r>
-              <a:rPr sz="1500">
-                <a:solidFill>
-                  <a:srgbClr val="22282E"/>
-                </a:solidFill>
-              </a:rPr>
-              <a:t>•  Certificate Transparency (CT): logs públicos de certificados TLS emitidos. Característica: revela subdominios sin consultar al objetivo.</a:t>
-            </a:r>
-          </a:p>
-          <a:p>
-            <a:pPr>
-              <a:spcAft>
-                <a:spcPts val="600"/>
-              </a:spcAft>
-            </a:pPr>
-            <a:r>
-              <a:rPr sz="1500">
-                <a:solidFill>
-                  <a:srgbClr val="22282E"/>
-                </a:solidFill>
-              </a:rPr>
-              <a:t>•  Enumeración pasiva de subdominios: descubrir hosts sin enviar tráfico al objetivo. Característica: casi indetectable.</a:t>
-            </a:r>
-          </a:p>
-          <a:p>
-            <a:pPr>
-              <a:spcAft>
-                <a:spcPts val="600"/>
-              </a:spcAft>
-            </a:pPr>
-            <a:r>
-              <a:rPr sz="1500">
-                <a:solidFill>
-                  <a:srgbClr val="22282E"/>
-                </a:solidFill>
-              </a:rPr>
-              <a:t>•  Registro TXT/SPF/DMARC: políticas de correo publicadas en DNS. Característica: indican si el dominio es fácil de suplantar.</a:t>
-            </a:r>
-          </a:p>
-          <a:p>
-            <a:pPr>
-              <a:spcAft>
-                <a:spcPts val="600"/>
-              </a:spcAft>
-            </a:pPr>
-            <a:r>
-              <a:rPr sz="1500">
-                <a:solidFill>
-                  <a:srgbClr val="22282E"/>
-                </a:solidFill>
-              </a:rPr>
-              <a:t>•  Fingerprinting: identificar tecnologías (CMS, servidor, framework). Característica: guía la explotación posterior.</a:t>
-            </a:r>
-          </a:p>
-          <a:p>
-            <a:pPr>
-              <a:spcAft>
-                <a:spcPts val="600"/>
-              </a:spcAft>
-            </a:pPr>
-            <a:r>
-              <a:rPr sz="1500">
-                <a:solidFill>
-                  <a:srgbClr val="22282E"/>
-                </a:solidFill>
-              </a:rPr>
-              <a:t>•  Secreto expuesto: clave/API filtrada en un repo o bucket. Característica: hallazgo de alto impacto y crítico de reportar.</a:t>
+              <a:t>•  El objetivo técnico es reconstruir relaciones entre entidades legales, marcas, dominios, certificados, rangos, proveedores y servicios. Cada relación necesita un tipo y una fecha. Un subdominio…</a:t>
+            </a:r>
+          </a:p>
+          <a:p>
+            <a:pPr>
+              <a:spcAft>
+                <a:spcPts val="600"/>
+              </a:spcAft>
+            </a:pPr>
+            <a:r>
+              <a:rPr sz="1500">
+                <a:solidFill>
+                  <a:srgbClr val="22282E"/>
+                </a:solidFill>
+              </a:rPr>
+              <a:t>•  Los registros DNS describen enrutamiento y delegación, no siempre propiedad. MX muestra quién recibe correo; NS, la autoridad DNS; TXT puede contener verificaciones y políticas. Certificate…</a:t>
+            </a:r>
+          </a:p>
+          <a:p>
+            <a:pPr>
+              <a:spcAft>
+                <a:spcPts val="600"/>
+              </a:spcAft>
+            </a:pPr>
+            <a:r>
+              <a:rPr sz="1500">
+                <a:solidFill>
+                  <a:srgbClr val="22282E"/>
+                </a:solidFill>
+              </a:rPr>
+              <a:t>•  Una adquisición, rebranding o proveedor deja huellas temporales. El analista combina fuentes corporativas, registros oficiales, DNS, certificados y repositorios públicos, manteniendo fechas. Para…</a:t>
+            </a:r>
+          </a:p>
+          <a:p>
+            <a:pPr>
+              <a:spcAft>
+                <a:spcPts val="600"/>
+              </a:spcAft>
+            </a:pPr>
+            <a:r>
+              <a:rPr sz="1500">
+                <a:solidFill>
+                  <a:srgbClr val="22282E"/>
+                </a:solidFill>
+              </a:rPr>
+              <a:t>•  La tecnología detectada mediante cabeceras, archivos públicos o repositorios es una hipótesis de versión. Los banners pueden estar ocultos o ser engañosos. Una dependencia mencionada en una vacante…</a:t>
+            </a:r>
+          </a:p>
+          <a:p>
+            <a:pPr>
+              <a:spcAft>
+                <a:spcPts val="600"/>
+              </a:spcAft>
+            </a:pPr>
+            <a:r>
+              <a:rPr sz="1500">
+                <a:solidFill>
+                  <a:srgbClr val="22282E"/>
+                </a:solidFill>
+              </a:rPr>
+              <a:t>•  Certificate Transparency revela support.empresa.example, que resuelve a una plataforma SaaS. El dominio está bajo la marca, pero la infraestructura y la operación pertenecen al proveedor. Para un…</a:t>
             </a:r>
           </a:p>
         </p:txBody>
@@ -4570,7 +5126,7 @@
                   <a:srgbClr val="0B3D2E"/>
                 </a:solidFill>
               </a:rPr>
-              <a:t>🧰 Herramientas y preparación</a:t>
+              <a:t>📔 Glosario operativo</a:t>
             </a:r>
           </a:p>
         </p:txBody>
@@ -4608,67 +5164,82 @@
                   <a:srgbClr val="22282E"/>
                 </a:solidFill>
               </a:rPr>
-              <a:t>•  DNS/WHOIS: whois, dig, host, dnsrecon.</a:t>
-            </a:r>
-          </a:p>
-          <a:p>
-            <a:pPr>
-              <a:spcAft>
-                <a:spcPts val="600"/>
-              </a:spcAft>
-            </a:pPr>
-            <a:r>
-              <a:rPr sz="1500">
-                <a:solidFill>
-                  <a:srgbClr val="22282E"/>
-                </a:solidFill>
-              </a:rPr>
-              <a:t>•  Subdominios pasivos: subfinder, amass enum -passive, crt.sh (https://crt.sh/?q=%25.example.com).</a:t>
-            </a:r>
-          </a:p>
-          <a:p>
-            <a:pPr>
-              <a:spcAft>
-                <a:spcPts val="600"/>
-              </a:spcAft>
-            </a:pPr>
-            <a:r>
-              <a:rPr sz="1500">
-                <a:solidFill>
-                  <a:srgbClr val="22282E"/>
-                </a:solidFill>
-              </a:rPr>
-              <a:t>•  Correos y tecnologías: theHarvester, Wappalyzer, httpx, BuiltWith.</a:t>
-            </a:r>
-          </a:p>
-          <a:p>
-            <a:pPr>
-              <a:spcAft>
-                <a:spcPts val="600"/>
-              </a:spcAft>
-            </a:pPr>
-            <a:r>
-              <a:rPr sz="1500">
-                <a:solidFill>
-                  <a:srgbClr val="22282E"/>
-                </a:solidFill>
-              </a:rPr>
-              <a:t>•  Filtraciones: GitHub dorks, trufflehog, gitleaks, buscadores de buckets S3.</a:t>
-            </a:r>
-          </a:p>
-          <a:p>
-            <a:pPr>
-              <a:spcAft>
-                <a:spcPts val="600"/>
-              </a:spcAft>
-            </a:pPr>
-            <a:r>
-              <a:rPr sz="1500">
-                <a:solidFill>
-                  <a:srgbClr val="22282E"/>
-                </a:solidFill>
-              </a:rPr>
-              <a:t>•  Recordatorio: favorece fuentes pasivas; el escaneo activo solo con autorización del alcance.</a:t>
+              <a:t>•  Término — Definición útil</a:t>
+            </a:r>
+          </a:p>
+          <a:p>
+            <a:pPr>
+              <a:spcAft>
+                <a:spcPts val="600"/>
+              </a:spcAft>
+            </a:pPr>
+            <a:r>
+              <a:rPr sz="1500">
+                <a:solidFill>
+                  <a:srgbClr val="22282E"/>
+                </a:solidFill>
+              </a:rPr>
+              <a:t>•  RDAP — Protocolo estructurado para consultar datos de registro de recursos de Internet.</a:t>
+            </a:r>
+          </a:p>
+          <a:p>
+            <a:pPr>
+              <a:spcAft>
+                <a:spcPts val="600"/>
+              </a:spcAft>
+            </a:pPr>
+            <a:r>
+              <a:rPr sz="1500">
+                <a:solidFill>
+                  <a:srgbClr val="22282E"/>
+                </a:solidFill>
+              </a:rPr>
+              <a:t>•  Certificate Transparency — Registros públicos auditables de certificados emitidos.</a:t>
+            </a:r>
+          </a:p>
+          <a:p>
+            <a:pPr>
+              <a:spcAft>
+                <a:spcPts val="600"/>
+              </a:spcAft>
+            </a:pPr>
+            <a:r>
+              <a:rPr sz="1500">
+                <a:solidFill>
+                  <a:srgbClr val="22282E"/>
+                </a:solidFill>
+              </a:rPr>
+              <a:t>•  ASN — Identificador de un sistema autónomo que anuncia prefijos, no sinónimo de empresa.</a:t>
+            </a:r>
+          </a:p>
+          <a:p>
+            <a:pPr>
+              <a:spcAft>
+                <a:spcPts val="600"/>
+              </a:spcAft>
+            </a:pPr>
+            <a:r>
+              <a:rPr sz="1500">
+                <a:solidFill>
+                  <a:srgbClr val="22282E"/>
+                </a:solidFill>
+              </a:rPr>
+              <a:t>•  Activo candidato — Recurso relacionado que aún requiere validar propiedad y vigencia.</a:t>
+            </a:r>
+          </a:p>
+          <a:p>
+            <a:pPr>
+              <a:spcAft>
+                <a:spcPts val="600"/>
+              </a:spcAft>
+            </a:pPr>
+            <a:r>
+              <a:rPr sz="1500">
+                <a:solidFill>
+                  <a:srgbClr val="22282E"/>
+                </a:solidFill>
+              </a:rPr>
+              <a:t>•  Dependencia externa — Servicio de un tercero que soporta una función de la organización.</a:t>
             </a:r>
           </a:p>
         </p:txBody>
@@ -4719,7 +5290,7 @@
                   <a:srgbClr val="0B3D2E"/>
                 </a:solidFill>
               </a:rPr>
-              <a:t>🧪 Laboratorio guiado</a:t>
+              <a:t>✅ Criterio de dominio</a:t>
             </a:r>
           </a:p>
         </p:txBody>
@@ -4757,97 +5328,7 @@
                   <a:srgbClr val="22282E"/>
                 </a:solidFill>
               </a:rPr>
-              <a:t>•  Objetivo autorizado: usa example.com y un dominio propio.</a:t>
-            </a:r>
-          </a:p>
-          <a:p>
-            <a:pPr>
-              <a:spcAft>
-                <a:spcPts val="600"/>
-              </a:spcAft>
-            </a:pPr>
-            <a:r>
-              <a:rPr sz="1500">
-                <a:solidFill>
-                  <a:srgbClr val="22282E"/>
-                </a:solidFill>
-              </a:rPr>
-              <a:t>•  WHOIS y fechas: whois example.com — anota registrador, fechas y NS.</a:t>
-            </a:r>
-          </a:p>
-          <a:p>
-            <a:pPr>
-              <a:spcAft>
-                <a:spcPts val="600"/>
-              </a:spcAft>
-            </a:pPr>
-            <a:r>
-              <a:rPr sz="1500">
-                <a:solidFill>
-                  <a:srgbClr val="22282E"/>
-                </a:solidFill>
-              </a:rPr>
-              <a:t>•  Registros DNS: dig example.com ANY +noall +answer y dig MX example.com.</a:t>
-            </a:r>
-          </a:p>
-          <a:p>
-            <a:pPr>
-              <a:spcAft>
-                <a:spcPts val="600"/>
-              </a:spcAft>
-            </a:pPr>
-            <a:r>
-              <a:rPr sz="1500">
-                <a:solidFill>
-                  <a:srgbClr val="22282E"/>
-                </a:solidFill>
-              </a:rPr>
-              <a:t>•  Política de correo: dig TXT example.com — busca SPF y dig TXT dmarc.example.com para DMARC.</a:t>
-            </a:r>
-          </a:p>
-          <a:p>
-            <a:pPr>
-              <a:spcAft>
-                <a:spcPts val="600"/>
-              </a:spcAft>
-            </a:pPr>
-            <a:r>
-              <a:rPr sz="1500">
-                <a:solidFill>
-                  <a:srgbClr val="22282E"/>
-                </a:solidFill>
-              </a:rPr>
-              <a:t>•  Subdominios por CT: abre https://crt.sh/?q=%25.tudominio.com y exporta la lista.</a:t>
-            </a:r>
-          </a:p>
-          <a:p>
-            <a:pPr>
-              <a:spcAft>
-                <a:spcPts val="600"/>
-              </a:spcAft>
-            </a:pPr>
-            <a:r>
-              <a:rPr sz="1500">
-                <a:solidFill>
-                  <a:srgbClr val="22282E"/>
-                </a:solidFill>
-              </a:rPr>
-              <a:t>•  Enumeración pasiva: subfinder -d tudominio.com -silent y amass enum -passive -d tudominio.com.</a:t>
-            </a:r>
-          </a:p>
-          <a:p>
-            <a:pPr>
-              <a:spcAft>
-                <a:spcPts val="600"/>
-              </a:spcAft>
-            </a:pPr>
-            <a:r>
-              <a:rPr sz="1500">
-                <a:solidFill>
-                  <a:srgbClr val="22282E"/>
-                </a:solidFill>
-              </a:rPr>
-              <a:t>•  Hosts vivos: subfinder -d tudominio.com -silent | httpx -title -tech-detect.</a:t>
+              <a:t>•  El alumno domina la clase si entrega un mapa temporal con relaciones tipadas, separa propiedad de alojamiento, valida activos con fuentes independientes y marca de forma explícita qué recursos no…</a:t>
             </a:r>
           </a:p>
         </p:txBody>
@@ -4898,7 +5379,7 @@
                   <a:srgbClr val="0B3D2E"/>
                 </a:solidFill>
               </a:rPr>
-              <a:t>✍️ Ejercicios</a:t>
+              <a:t>📖 Definiciones y características</a:t>
             </a:r>
           </a:p>
         </p:txBody>
@@ -4936,82 +5417,82 @@
                   <a:srgbClr val="22282E"/>
                 </a:solidFill>
               </a:rPr>
-              <a:t>•  Compara los subdominios que devuelven crt.sh, subfinder y amass; explica las diferencias.</a:t>
-            </a:r>
-          </a:p>
-          <a:p>
-            <a:pPr>
-              <a:spcAft>
-                <a:spcPts val="600"/>
-              </a:spcAft>
-            </a:pPr>
-            <a:r>
-              <a:rPr sz="1500">
-                <a:solidFill>
-                  <a:srgbClr val="22282E"/>
-                </a:solidFill>
-              </a:rPr>
-              <a:t>•  Evalúa el SPF/DMARC de un dominio y decide si es suplantable.</a:t>
-            </a:r>
-          </a:p>
-          <a:p>
-            <a:pPr>
-              <a:spcAft>
-                <a:spcPts val="600"/>
-              </a:spcAft>
-            </a:pPr>
-            <a:r>
-              <a:rPr sz="1500">
-                <a:solidFill>
-                  <a:srgbClr val="22282E"/>
-                </a:solidFill>
-              </a:rPr>
-              <a:t>•  Clasifica 5 subdominios por riesgo (panel de login, dev, staging, etc.).</a:t>
-            </a:r>
-          </a:p>
-          <a:p>
-            <a:pPr>
-              <a:spcAft>
-                <a:spcPts val="600"/>
-              </a:spcAft>
-            </a:pPr>
-            <a:r>
-              <a:rPr sz="1500">
-                <a:solidFill>
-                  <a:srgbClr val="22282E"/>
-                </a:solidFill>
-              </a:rPr>
-              <a:t>•  Ejecuta httpx -tech-detect y prioriza 3 tecnologías por CVE conocido.</a:t>
-            </a:r>
-          </a:p>
-          <a:p>
-            <a:pPr>
-              <a:spcAft>
-                <a:spcPts val="600"/>
-              </a:spcAft>
-            </a:pPr>
-            <a:r>
-              <a:rPr sz="1500">
-                <a:solidFill>
-                  <a:srgbClr val="22282E"/>
-                </a:solidFill>
-              </a:rPr>
-              <a:t>•  Deriva el patrón de correo corporativo (nombre.apellido@) a partir de ejemplos públicos.</a:t>
-            </a:r>
-          </a:p>
-          <a:p>
-            <a:pPr>
-              <a:spcAft>
-                <a:spcPts val="600"/>
-              </a:spcAft>
-            </a:pPr>
-            <a:r>
-              <a:rPr sz="1500">
-                <a:solidFill>
-                  <a:srgbClr val="22282E"/>
-                </a:solidFill>
-              </a:rPr>
-              <a:t>•  Documenta un secreto ficticio "encontrado" y redacta la sección de reporte responsable.</a:t>
+              <a:t>•  WHOIS: base de datos de registro de dominios/IP. Característica: cada vez más ofuscada por privacidad, pero útil por fechas y NS.</a:t>
+            </a:r>
+          </a:p>
+          <a:p>
+            <a:pPr>
+              <a:spcAft>
+                <a:spcPts val="600"/>
+              </a:spcAft>
+            </a:pPr>
+            <a:r>
+              <a:rPr sz="1500">
+                <a:solidFill>
+                  <a:srgbClr val="22282E"/>
+                </a:solidFill>
+              </a:rPr>
+              <a:t>•  Certificate Transparency (CT): logs públicos de certificados TLS emitidos. Característica: revela subdominios sin consultar al objetivo.</a:t>
+            </a:r>
+          </a:p>
+          <a:p>
+            <a:pPr>
+              <a:spcAft>
+                <a:spcPts val="600"/>
+              </a:spcAft>
+            </a:pPr>
+            <a:r>
+              <a:rPr sz="1500">
+                <a:solidFill>
+                  <a:srgbClr val="22282E"/>
+                </a:solidFill>
+              </a:rPr>
+              <a:t>•  Enumeración pasiva de subdominios: descubrir nombres mediante índices y fuentes de terceros sin consultar directamente cada host. Característica: reduce interacción directa, pero las fuentes…</a:t>
+            </a:r>
+          </a:p>
+          <a:p>
+            <a:pPr>
+              <a:spcAft>
+                <a:spcPts val="600"/>
+              </a:spcAft>
+            </a:pPr>
+            <a:r>
+              <a:rPr sz="1500">
+                <a:solidFill>
+                  <a:srgbClr val="22282E"/>
+                </a:solidFill>
+              </a:rPr>
+              <a:t>•  Registro TXT/SPF/DMARC: políticas de correo publicadas en DNS. Característica: indican si el dominio es fácil de suplantar.</a:t>
+            </a:r>
+          </a:p>
+          <a:p>
+            <a:pPr>
+              <a:spcAft>
+                <a:spcPts val="600"/>
+              </a:spcAft>
+            </a:pPr>
+            <a:r>
+              <a:rPr sz="1500">
+                <a:solidFill>
+                  <a:srgbClr val="22282E"/>
+                </a:solidFill>
+              </a:rPr>
+              <a:t>•  Fingerprinting: identificar tecnologías (CMS, servidor, framework). Característica: guía la explotación posterior.</a:t>
+            </a:r>
+          </a:p>
+          <a:p>
+            <a:pPr>
+              <a:spcAft>
+                <a:spcPts val="600"/>
+              </a:spcAft>
+            </a:pPr>
+            <a:r>
+              <a:rPr sz="1500">
+                <a:solidFill>
+                  <a:srgbClr val="22282E"/>
+                </a:solidFill>
+              </a:rPr>
+              <a:t>•  Secreto expuesto: clave/API filtrada en un repo o bucket. Característica: hallazgo de alto impacto y crítico de reportar.</a:t>
             </a:r>
           </a:p>
         </p:txBody>
